--- a/output_pptx/I_Give_You_My_Heart.pptx
+++ b/output_pptx/I_Give_You_My_Heart.pptx
@@ -3111,8 +3111,8 @@
         </p:nvSpPr>
         <p:spPr>
           <a:xfrm>
-            <a:off x="594360" y="2258568"/>
-            <a:ext cx="11002975" cy="685800"/>
+            <a:off x="640080" y="2052828"/>
+            <a:ext cx="10911535" cy="731520"/>
           </a:xfrm>
           <a:prstGeom prst="rect">
             <a:avLst/>
@@ -3127,7 +3127,7 @@
           <a:p>
             <a:pPr algn="ctr"/>
             <a:r>
-              <a:rPr sz="4400" b="1" i="0">
+              <a:rPr sz="4800" b="1" i="0">
                 <a:solidFill>
                   <a:srgbClr val="FFFFFF"/>
                 </a:solidFill>
@@ -3146,8 +3146,8 @@
         </p:nvSpPr>
         <p:spPr>
           <a:xfrm>
-            <a:off x="594360" y="2980944"/>
-            <a:ext cx="11002975" cy="347472"/>
+            <a:off x="640080" y="2985516"/>
+            <a:ext cx="10911535" cy="731520"/>
           </a:xfrm>
           <a:prstGeom prst="rect">
             <a:avLst/>
@@ -3162,13 +3162,13 @@
           <a:p>
             <a:pPr algn="ctr"/>
             <a:r>
-              <a:rPr sz="2200" b="0" i="1">
-                <a:solidFill>
-                  <a:srgbClr val="8C8C8C"/>
+              <a:rPr sz="4800" b="1" i="0">
+                <a:solidFill>
+                  <a:srgbClr val="FFFFFF"/>
                 </a:solidFill>
                 <a:latin typeface="Arial"/>
               </a:rPr>
-              <a:t/>
+              <a:t>Te entrego meu coração</a:t>
             </a:r>
           </a:p>
         </p:txBody>
@@ -3181,8 +3181,8 @@
         </p:nvSpPr>
         <p:spPr>
           <a:xfrm>
-            <a:off x="594360" y="3529584"/>
-            <a:ext cx="11002975" cy="685800"/>
+            <a:off x="640080" y="4128516"/>
+            <a:ext cx="10911535" cy="310896"/>
           </a:xfrm>
           <a:prstGeom prst="rect">
             <a:avLst/>
@@ -3197,13 +3197,13 @@
           <a:p>
             <a:pPr algn="ctr"/>
             <a:r>
-              <a:rPr sz="4400" b="1" i="0">
-                <a:solidFill>
-                  <a:srgbClr val="FFFFFF"/>
+              <a:rPr sz="2000" b="0" i="0">
+                <a:solidFill>
+                  <a:srgbClr val="828282"/>
                 </a:solidFill>
                 <a:latin typeface="Arial"/>
               </a:rPr>
-              <a:t>Te entrego meu coração</a:t>
+              <a:t>私の願い 主 イエスを</a:t>
             </a:r>
           </a:p>
         </p:txBody>
@@ -3216,8 +3216,8 @@
         </p:nvSpPr>
         <p:spPr>
           <a:xfrm>
-            <a:off x="594360" y="4251960"/>
-            <a:ext cx="11002975" cy="347472"/>
+            <a:off x="640080" y="4494276"/>
+            <a:ext cx="10911535" cy="310896"/>
           </a:xfrm>
           <a:prstGeom prst="rect">
             <a:avLst/>
@@ -3232,13 +3232,13 @@
           <a:p>
             <a:pPr algn="ctr"/>
             <a:r>
-              <a:rPr sz="2200" b="0" i="1">
-                <a:solidFill>
-                  <a:srgbClr val="8C8C8C"/>
+              <a:rPr sz="2000" b="0" i="0">
+                <a:solidFill>
+                  <a:srgbClr val="828282"/>
                 </a:solidFill>
                 <a:latin typeface="Arial"/>
               </a:rPr>
-              <a:t/>
+              <a:t>心からあがめ たたえる</a:t>
             </a:r>
           </a:p>
         </p:txBody>
@@ -3277,8 +3277,8 @@
         </p:nvSpPr>
         <p:spPr>
           <a:xfrm>
-            <a:off x="594360" y="2258568"/>
-            <a:ext cx="11002975" cy="685800"/>
+            <a:off x="640080" y="2052828"/>
+            <a:ext cx="10911535" cy="731520"/>
           </a:xfrm>
           <a:prstGeom prst="rect">
             <a:avLst/>
@@ -3293,7 +3293,7 @@
           <a:p>
             <a:pPr algn="ctr"/>
             <a:r>
-              <a:rPr sz="4400" b="1" i="0">
+              <a:rPr sz="4800" b="1" i="0">
                 <a:solidFill>
                   <a:srgbClr val="FFFFFF"/>
                 </a:solidFill>
@@ -3312,8 +3312,8 @@
         </p:nvSpPr>
         <p:spPr>
           <a:xfrm>
-            <a:off x="594360" y="2980944"/>
-            <a:ext cx="11002975" cy="347472"/>
+            <a:off x="640080" y="2985516"/>
+            <a:ext cx="10911535" cy="731520"/>
           </a:xfrm>
           <a:prstGeom prst="rect">
             <a:avLst/>
@@ -3328,13 +3328,13 @@
           <a:p>
             <a:pPr algn="ctr"/>
             <a:r>
-              <a:rPr sz="2200" b="0" i="1">
-                <a:solidFill>
-                  <a:srgbClr val="8C8C8C"/>
+              <a:rPr sz="4800" b="1" i="0">
+                <a:solidFill>
+                  <a:srgbClr val="FFFFFF"/>
                 </a:solidFill>
                 <a:latin typeface="Arial"/>
               </a:rPr>
-              <a:t/>
+              <a:t>Honrar a Ti</a:t>
             </a:r>
           </a:p>
         </p:txBody>
@@ -3347,8 +3347,8 @@
         </p:nvSpPr>
         <p:spPr>
           <a:xfrm>
-            <a:off x="594360" y="3529584"/>
-            <a:ext cx="11002975" cy="685800"/>
+            <a:off x="640080" y="4128516"/>
+            <a:ext cx="10911535" cy="310896"/>
           </a:xfrm>
           <a:prstGeom prst="rect">
             <a:avLst/>
@@ -3363,13 +3363,13 @@
           <a:p>
             <a:pPr algn="ctr"/>
             <a:r>
-              <a:rPr sz="4400" b="1" i="0">
-                <a:solidFill>
-                  <a:srgbClr val="FFFFFF"/>
+              <a:rPr sz="2000" b="0" i="0">
+                <a:solidFill>
+                  <a:srgbClr val="828282"/>
                 </a:solidFill>
                 <a:latin typeface="Arial"/>
               </a:rPr>
-              <a:t>Honrar a Ti</a:t>
+              <a:t>全ての賛美は　あなたに</a:t>
             </a:r>
           </a:p>
         </p:txBody>
@@ -3382,8 +3382,8 @@
         </p:nvSpPr>
         <p:spPr>
           <a:xfrm>
-            <a:off x="594360" y="4251960"/>
-            <a:ext cx="11002975" cy="347472"/>
+            <a:off x="640080" y="4494276"/>
+            <a:ext cx="10911535" cy="310896"/>
           </a:xfrm>
           <a:prstGeom prst="rect">
             <a:avLst/>
@@ -3398,13 +3398,13 @@
           <a:p>
             <a:pPr algn="ctr"/>
             <a:r>
-              <a:rPr sz="2200" b="0" i="1">
-                <a:solidFill>
-                  <a:srgbClr val="8C8C8C"/>
+              <a:rPr sz="2000" b="0" i="0">
+                <a:solidFill>
+                  <a:srgbClr val="828282"/>
                 </a:solidFill>
                 <a:latin typeface="Arial"/>
               </a:rPr>
-              <a:t/>
+              <a:t>かけがえのない主イエスに</a:t>
             </a:r>
           </a:p>
         </p:txBody>
@@ -3443,8 +3443,8 @@
         </p:nvSpPr>
         <p:spPr>
           <a:xfrm>
-            <a:off x="594360" y="2258568"/>
-            <a:ext cx="11002975" cy="685800"/>
+            <a:off x="640080" y="2052828"/>
+            <a:ext cx="10911535" cy="731520"/>
           </a:xfrm>
           <a:prstGeom prst="rect">
             <a:avLst/>
@@ -3459,7 +3459,7 @@
           <a:p>
             <a:pPr algn="ctr"/>
             <a:r>
-              <a:rPr sz="4400" b="1" i="0">
+              <a:rPr sz="4800" b="1" i="0">
                 <a:solidFill>
                   <a:srgbClr val="FFFFFF"/>
                 </a:solidFill>
@@ -3478,8 +3478,8 @@
         </p:nvSpPr>
         <p:spPr>
           <a:xfrm>
-            <a:off x="594360" y="2980944"/>
-            <a:ext cx="11002975" cy="347472"/>
+            <a:off x="640080" y="2985516"/>
+            <a:ext cx="10911535" cy="731520"/>
           </a:xfrm>
           <a:prstGeom prst="rect">
             <a:avLst/>
@@ -3494,13 +3494,13 @@
           <a:p>
             <a:pPr algn="ctr"/>
             <a:r>
-              <a:rPr sz="2200" b="0" i="1">
-                <a:solidFill>
-                  <a:srgbClr val="8C8C8C"/>
+              <a:rPr sz="4800" b="1" i="0">
+                <a:solidFill>
+                  <a:srgbClr val="FFFFFF"/>
                 </a:solidFill>
                 <a:latin typeface="Arial"/>
               </a:rPr>
-              <a:t/>
+              <a:t>Eu adoro a Ti</a:t>
             </a:r>
           </a:p>
         </p:txBody>
@@ -3513,8 +3513,8 @@
         </p:nvSpPr>
         <p:spPr>
           <a:xfrm>
-            <a:off x="594360" y="3529584"/>
-            <a:ext cx="11002975" cy="685800"/>
+            <a:off x="640080" y="4128516"/>
+            <a:ext cx="10911535" cy="310896"/>
           </a:xfrm>
           <a:prstGeom prst="rect">
             <a:avLst/>
@@ -3529,13 +3529,13 @@
           <a:p>
             <a:pPr algn="ctr"/>
             <a:r>
-              <a:rPr sz="4400" b="1" i="0">
-                <a:solidFill>
-                  <a:srgbClr val="FFFFFF"/>
+              <a:rPr sz="2000" b="0" i="0">
+                <a:solidFill>
+                  <a:srgbClr val="828282"/>
                 </a:solidFill>
                 <a:latin typeface="Arial"/>
               </a:rPr>
-              <a:t>Eu adoro a Ti</a:t>
+              <a:t>わが心と わがたましい を</a:t>
             </a:r>
           </a:p>
         </p:txBody>
@@ -3548,8 +3548,8 @@
         </p:nvSpPr>
         <p:spPr>
           <a:xfrm>
-            <a:off x="594360" y="4251960"/>
-            <a:ext cx="11002975" cy="347472"/>
+            <a:off x="640080" y="4494276"/>
+            <a:ext cx="10911535" cy="310896"/>
           </a:xfrm>
           <a:prstGeom prst="rect">
             <a:avLst/>
@@ -3564,13 +3564,13 @@
           <a:p>
             <a:pPr algn="ctr"/>
             <a:r>
-              <a:rPr sz="2200" b="0" i="1">
-                <a:solidFill>
-                  <a:srgbClr val="8C8C8C"/>
+              <a:rPr sz="2000" b="0" i="0">
+                <a:solidFill>
+                  <a:srgbClr val="828282"/>
                 </a:solidFill>
                 <a:latin typeface="Arial"/>
               </a:rPr>
-              <a:t/>
+              <a:t>あなたにささげ</a:t>
             </a:r>
           </a:p>
         </p:txBody>
@@ -3609,8 +3609,8 @@
         </p:nvSpPr>
         <p:spPr>
           <a:xfrm>
-            <a:off x="594360" y="2258568"/>
-            <a:ext cx="11002975" cy="685800"/>
+            <a:off x="640080" y="2052828"/>
+            <a:ext cx="10911535" cy="731520"/>
           </a:xfrm>
           <a:prstGeom prst="rect">
             <a:avLst/>
@@ -3625,7 +3625,7 @@
           <a:p>
             <a:pPr algn="ctr"/>
             <a:r>
-              <a:rPr sz="4400" b="1" i="0">
+              <a:rPr sz="4800" b="1" i="0">
                 <a:solidFill>
                   <a:srgbClr val="FFFFFF"/>
                 </a:solidFill>
@@ -3644,8 +3644,8 @@
         </p:nvSpPr>
         <p:spPr>
           <a:xfrm>
-            <a:off x="594360" y="2980944"/>
-            <a:ext cx="11002975" cy="347472"/>
+            <a:off x="640080" y="2985516"/>
+            <a:ext cx="10911535" cy="731520"/>
           </a:xfrm>
           <a:prstGeom prst="rect">
             <a:avLst/>
@@ -3660,13 +3660,13 @@
           <a:p>
             <a:pPr algn="ctr"/>
             <a:r>
-              <a:rPr sz="2200" b="0" i="1">
-                <a:solidFill>
-                  <a:srgbClr val="8C8C8C"/>
+              <a:rPr sz="4800" b="1" i="0">
+                <a:solidFill>
+                  <a:srgbClr val="FFFFFF"/>
                 </a:solidFill>
                 <a:latin typeface="Arial"/>
               </a:rPr>
-              <a:t/>
+              <a:t>Te dou meu louvor</a:t>
             </a:r>
           </a:p>
         </p:txBody>
@@ -3679,8 +3679,8 @@
         </p:nvSpPr>
         <p:spPr>
           <a:xfrm>
-            <a:off x="594360" y="3529584"/>
-            <a:ext cx="11002975" cy="685800"/>
+            <a:off x="640080" y="4128516"/>
+            <a:ext cx="10911535" cy="310896"/>
           </a:xfrm>
           <a:prstGeom prst="rect">
             <a:avLst/>
@@ -3695,13 +3695,13 @@
           <a:p>
             <a:pPr algn="ctr"/>
             <a:r>
-              <a:rPr sz="4400" b="1" i="0">
-                <a:solidFill>
-                  <a:srgbClr val="FFFFFF"/>
+              <a:rPr sz="2000" b="0" i="0">
+                <a:solidFill>
+                  <a:srgbClr val="828282"/>
                 </a:solidFill>
                 <a:latin typeface="Arial"/>
               </a:rPr>
-              <a:t>Te dou meu louvor</a:t>
+              <a:t>生きるかぎり あなたの道を</a:t>
             </a:r>
           </a:p>
         </p:txBody>
@@ -3714,8 +3714,8 @@
         </p:nvSpPr>
         <p:spPr>
           <a:xfrm>
-            <a:off x="594360" y="4251960"/>
-            <a:ext cx="11002975" cy="347472"/>
+            <a:off x="640080" y="4494276"/>
+            <a:ext cx="10911535" cy="310896"/>
           </a:xfrm>
           <a:prstGeom prst="rect">
             <a:avLst/>
@@ -3730,13 +3730,13 @@
           <a:p>
             <a:pPr algn="ctr"/>
             <a:r>
-              <a:rPr sz="2200" b="0" i="1">
-                <a:solidFill>
-                  <a:srgbClr val="8C8C8C"/>
+              <a:rPr sz="2000" b="0" i="0">
+                <a:solidFill>
+                  <a:srgbClr val="828282"/>
                 </a:solidFill>
                 <a:latin typeface="Arial"/>
               </a:rPr>
-              <a:t/>
+              <a:t>あゆませたまえ</a:t>
             </a:r>
           </a:p>
         </p:txBody>
@@ -3775,8 +3775,8 @@
         </p:nvSpPr>
         <p:spPr>
           <a:xfrm>
-            <a:off x="594360" y="1837944"/>
-            <a:ext cx="11002975" cy="685800"/>
+            <a:off x="640080" y="1650492"/>
+            <a:ext cx="10911535" cy="731520"/>
           </a:xfrm>
           <a:prstGeom prst="rect">
             <a:avLst/>
@@ -3791,7 +3791,7 @@
           <a:p>
             <a:pPr algn="ctr"/>
             <a:r>
-              <a:rPr sz="4400" b="1" i="0">
+              <a:rPr sz="4800" b="1" i="0">
                 <a:solidFill>
                   <a:srgbClr val="FFFFFF"/>
                 </a:solidFill>
@@ -3810,8 +3810,8 @@
         </p:nvSpPr>
         <p:spPr>
           <a:xfrm>
-            <a:off x="594360" y="2560320"/>
-            <a:ext cx="11002975" cy="384048"/>
+            <a:off x="640080" y="2418588"/>
+            <a:ext cx="10911535" cy="365760"/>
           </a:xfrm>
           <a:prstGeom prst="rect">
             <a:avLst/>
@@ -3828,7 +3828,7 @@
             <a:r>
               <a:rPr sz="2400" b="0" i="1">
                 <a:solidFill>
-                  <a:srgbClr val="B4B4B4"/>
+                  <a:srgbClr val="AAAAAA"/>
                 </a:solidFill>
                 <a:latin typeface="Arial"/>
               </a:rPr>
@@ -3845,8 +3845,8 @@
         </p:nvSpPr>
         <p:spPr>
           <a:xfrm>
-            <a:off x="594360" y="2980944"/>
-            <a:ext cx="11002975" cy="347472"/>
+            <a:off x="640080" y="2985516"/>
+            <a:ext cx="10911535" cy="731520"/>
           </a:xfrm>
           <a:prstGeom prst="rect">
             <a:avLst/>
@@ -3861,13 +3861,13 @@
           <a:p>
             <a:pPr algn="ctr"/>
             <a:r>
-              <a:rPr sz="2000" b="0" i="1">
-                <a:solidFill>
-                  <a:srgbClr val="8C8C8C"/>
+              <a:rPr sz="4800" b="1" i="0">
+                <a:solidFill>
+                  <a:srgbClr val="FFFFFF"/>
                 </a:solidFill>
                 <a:latin typeface="Arial"/>
               </a:rPr>
-              <a:t/>
+              <a:t>心からあがめ たたえる</a:t>
             </a:r>
           </a:p>
         </p:txBody>
@@ -3880,8 +3880,8 @@
         </p:nvSpPr>
         <p:spPr>
           <a:xfrm>
-            <a:off x="594360" y="3529584"/>
-            <a:ext cx="11002975" cy="685800"/>
+            <a:off x="640080" y="3753612"/>
+            <a:ext cx="10911535" cy="365760"/>
           </a:xfrm>
           <a:prstGeom prst="rect">
             <a:avLst/>
@@ -3896,13 +3896,13 @@
           <a:p>
             <a:pPr algn="ctr"/>
             <a:r>
-              <a:rPr sz="4400" b="1" i="0">
-                <a:solidFill>
-                  <a:srgbClr val="FFFFFF"/>
+              <a:rPr sz="2400" b="0" i="1">
+                <a:solidFill>
+                  <a:srgbClr val="AAAAAA"/>
                 </a:solidFill>
                 <a:latin typeface="Arial"/>
               </a:rPr>
-              <a:t>心からあがめ たたえる</a:t>
+              <a:t>kokoro kara agame tataeru</a:t>
             </a:r>
           </a:p>
         </p:txBody>
@@ -3915,8 +3915,8 @@
         </p:nvSpPr>
         <p:spPr>
           <a:xfrm>
-            <a:off x="594360" y="4251960"/>
-            <a:ext cx="11002975" cy="384048"/>
+            <a:off x="640080" y="4530852"/>
+            <a:ext cx="10911535" cy="310896"/>
           </a:xfrm>
           <a:prstGeom prst="rect">
             <a:avLst/>
@@ -3931,13 +3931,13 @@
           <a:p>
             <a:pPr algn="ctr"/>
             <a:r>
-              <a:rPr sz="2400" b="0" i="1">
-                <a:solidFill>
-                  <a:srgbClr val="B4B4B4"/>
+              <a:rPr sz="2000" b="0" i="1">
+                <a:solidFill>
+                  <a:srgbClr val="828282"/>
                 </a:solidFill>
                 <a:latin typeface="Arial"/>
               </a:rPr>
-              <a:t>kokoro kara agame tataeru</a:t>
+              <a:t>Te Entrego Meu Coração</a:t>
             </a:r>
           </a:p>
         </p:txBody>
@@ -3950,8 +3950,8 @@
         </p:nvSpPr>
         <p:spPr>
           <a:xfrm>
-            <a:off x="594360" y="4672584"/>
-            <a:ext cx="11002975" cy="347472"/>
+            <a:off x="640080" y="4896612"/>
+            <a:ext cx="10911535" cy="310896"/>
           </a:xfrm>
           <a:prstGeom prst="rect">
             <a:avLst/>
@@ -3968,11 +3968,11 @@
             <a:r>
               <a:rPr sz="2000" b="0" i="1">
                 <a:solidFill>
-                  <a:srgbClr val="8C8C8C"/>
+                  <a:srgbClr val="828282"/>
                 </a:solidFill>
                 <a:latin typeface="Arial"/>
               </a:rPr>
-              <a:t/>
+              <a:t>Te entrego meu coração</a:t>
             </a:r>
           </a:p>
         </p:txBody>
@@ -4011,8 +4011,8 @@
         </p:nvSpPr>
         <p:spPr>
           <a:xfrm>
-            <a:off x="594360" y="1837944"/>
-            <a:ext cx="11002975" cy="685800"/>
+            <a:off x="640080" y="1650492"/>
+            <a:ext cx="10911535" cy="731520"/>
           </a:xfrm>
           <a:prstGeom prst="rect">
             <a:avLst/>
@@ -4027,7 +4027,7 @@
           <a:p>
             <a:pPr algn="ctr"/>
             <a:r>
-              <a:rPr sz="4400" b="1" i="0">
+              <a:rPr sz="4800" b="1" i="0">
                 <a:solidFill>
                   <a:srgbClr val="FFFFFF"/>
                 </a:solidFill>
@@ -4046,8 +4046,8 @@
         </p:nvSpPr>
         <p:spPr>
           <a:xfrm>
-            <a:off x="594360" y="2560320"/>
-            <a:ext cx="11002975" cy="384048"/>
+            <a:off x="640080" y="2418588"/>
+            <a:ext cx="10911535" cy="365760"/>
           </a:xfrm>
           <a:prstGeom prst="rect">
             <a:avLst/>
@@ -4064,7 +4064,7 @@
             <a:r>
               <a:rPr sz="2400" b="0" i="1">
                 <a:solidFill>
-                  <a:srgbClr val="B4B4B4"/>
+                  <a:srgbClr val="AAAAAA"/>
                 </a:solidFill>
                 <a:latin typeface="Arial"/>
               </a:rPr>
@@ -4081,8 +4081,8 @@
         </p:nvSpPr>
         <p:spPr>
           <a:xfrm>
-            <a:off x="594360" y="2980944"/>
-            <a:ext cx="11002975" cy="347472"/>
+            <a:off x="640080" y="2985516"/>
+            <a:ext cx="10911535" cy="731520"/>
           </a:xfrm>
           <a:prstGeom prst="rect">
             <a:avLst/>
@@ -4097,13 +4097,13 @@
           <a:p>
             <a:pPr algn="ctr"/>
             <a:r>
-              <a:rPr sz="2000" b="0" i="1">
-                <a:solidFill>
-                  <a:srgbClr val="8C8C8C"/>
+              <a:rPr sz="4800" b="1" i="0">
+                <a:solidFill>
+                  <a:srgbClr val="FFFFFF"/>
                 </a:solidFill>
                 <a:latin typeface="Arial"/>
               </a:rPr>
-              <a:t/>
+              <a:t>かけがえのない主イエスに</a:t>
             </a:r>
           </a:p>
         </p:txBody>
@@ -4116,8 +4116,8 @@
         </p:nvSpPr>
         <p:spPr>
           <a:xfrm>
-            <a:off x="594360" y="3529584"/>
-            <a:ext cx="11002975" cy="685800"/>
+            <a:off x="640080" y="3753612"/>
+            <a:ext cx="10911535" cy="365760"/>
           </a:xfrm>
           <a:prstGeom prst="rect">
             <a:avLst/>
@@ -4132,13 +4132,13 @@
           <a:p>
             <a:pPr algn="ctr"/>
             <a:r>
-              <a:rPr sz="4400" b="1" i="0">
-                <a:solidFill>
-                  <a:srgbClr val="FFFFFF"/>
+              <a:rPr sz="2400" b="0" i="1">
+                <a:solidFill>
+                  <a:srgbClr val="AAAAAA"/>
                 </a:solidFill>
                 <a:latin typeface="Arial"/>
               </a:rPr>
-              <a:t>かけがえのない主イエスに</a:t>
+              <a:t>kakegae no nai shu iesu ni</a:t>
             </a:r>
           </a:p>
         </p:txBody>
@@ -4151,8 +4151,8 @@
         </p:nvSpPr>
         <p:spPr>
           <a:xfrm>
-            <a:off x="594360" y="4251960"/>
-            <a:ext cx="11002975" cy="384048"/>
+            <a:off x="640080" y="4530852"/>
+            <a:ext cx="10911535" cy="310896"/>
           </a:xfrm>
           <a:prstGeom prst="rect">
             <a:avLst/>
@@ -4167,13 +4167,13 @@
           <a:p>
             <a:pPr algn="ctr"/>
             <a:r>
-              <a:rPr sz="2400" b="0" i="1">
-                <a:solidFill>
-                  <a:srgbClr val="B4B4B4"/>
+              <a:rPr sz="2000" b="0" i="1">
+                <a:solidFill>
+                  <a:srgbClr val="828282"/>
                 </a:solidFill>
                 <a:latin typeface="Arial"/>
               </a:rPr>
-              <a:t>kakegae no nai shu iesu ni</a:t>
+              <a:t>Este é o meu desejo</a:t>
             </a:r>
           </a:p>
         </p:txBody>
@@ -4186,8 +4186,8 @@
         </p:nvSpPr>
         <p:spPr>
           <a:xfrm>
-            <a:off x="594360" y="4672584"/>
-            <a:ext cx="11002975" cy="347472"/>
+            <a:off x="640080" y="4896612"/>
+            <a:ext cx="10911535" cy="310896"/>
           </a:xfrm>
           <a:prstGeom prst="rect">
             <a:avLst/>
@@ -4204,11 +4204,11 @@
             <a:r>
               <a:rPr sz="2000" b="0" i="1">
                 <a:solidFill>
-                  <a:srgbClr val="8C8C8C"/>
+                  <a:srgbClr val="828282"/>
                 </a:solidFill>
                 <a:latin typeface="Arial"/>
               </a:rPr>
-              <a:t/>
+              <a:t>Honrar a Ti</a:t>
             </a:r>
           </a:p>
         </p:txBody>
@@ -4247,8 +4247,8 @@
         </p:nvSpPr>
         <p:spPr>
           <a:xfrm>
-            <a:off x="594360" y="1837944"/>
-            <a:ext cx="11002975" cy="685800"/>
+            <a:off x="640080" y="1650492"/>
+            <a:ext cx="10911535" cy="731520"/>
           </a:xfrm>
           <a:prstGeom prst="rect">
             <a:avLst/>
@@ -4263,7 +4263,7 @@
           <a:p>
             <a:pPr algn="ctr"/>
             <a:r>
-              <a:rPr sz="4400" b="1" i="0">
+              <a:rPr sz="4800" b="1" i="0">
                 <a:solidFill>
                   <a:srgbClr val="FFFFFF"/>
                 </a:solidFill>
@@ -4282,8 +4282,8 @@
         </p:nvSpPr>
         <p:spPr>
           <a:xfrm>
-            <a:off x="594360" y="2560320"/>
-            <a:ext cx="11002975" cy="384048"/>
+            <a:off x="640080" y="2418588"/>
+            <a:ext cx="10911535" cy="365760"/>
           </a:xfrm>
           <a:prstGeom prst="rect">
             <a:avLst/>
@@ -4300,7 +4300,7 @@
             <a:r>
               <a:rPr sz="2400" b="0" i="1">
                 <a:solidFill>
-                  <a:srgbClr val="B4B4B4"/>
+                  <a:srgbClr val="AAAAAA"/>
                 </a:solidFill>
                 <a:latin typeface="Arial"/>
               </a:rPr>
@@ -4317,8 +4317,8 @@
         </p:nvSpPr>
         <p:spPr>
           <a:xfrm>
-            <a:off x="594360" y="2980944"/>
-            <a:ext cx="11002975" cy="347472"/>
+            <a:off x="640080" y="2985516"/>
+            <a:ext cx="10911535" cy="731520"/>
           </a:xfrm>
           <a:prstGeom prst="rect">
             <a:avLst/>
@@ -4333,13 +4333,13 @@
           <a:p>
             <a:pPr algn="ctr"/>
             <a:r>
-              <a:rPr sz="2000" b="0" i="1">
-                <a:solidFill>
-                  <a:srgbClr val="8C8C8C"/>
+              <a:rPr sz="4800" b="1" i="0">
+                <a:solidFill>
+                  <a:srgbClr val="FFFFFF"/>
                 </a:solidFill>
                 <a:latin typeface="Arial"/>
               </a:rPr>
-              <a:t/>
+              <a:t>あなたにささげ</a:t>
             </a:r>
           </a:p>
         </p:txBody>
@@ -4352,8 +4352,8 @@
         </p:nvSpPr>
         <p:spPr>
           <a:xfrm>
-            <a:off x="594360" y="3529584"/>
-            <a:ext cx="11002975" cy="685800"/>
+            <a:off x="640080" y="3753612"/>
+            <a:ext cx="10911535" cy="365760"/>
           </a:xfrm>
           <a:prstGeom prst="rect">
             <a:avLst/>
@@ -4368,13 +4368,13 @@
           <a:p>
             <a:pPr algn="ctr"/>
             <a:r>
-              <a:rPr sz="4400" b="1" i="0">
-                <a:solidFill>
-                  <a:srgbClr val="FFFFFF"/>
+              <a:rPr sz="2400" b="0" i="1">
+                <a:solidFill>
+                  <a:srgbClr val="AAAAAA"/>
                 </a:solidFill>
                 <a:latin typeface="Arial"/>
               </a:rPr>
-              <a:t>あなたにささげ</a:t>
+              <a:t>anata ni sasage</a:t>
             </a:r>
           </a:p>
         </p:txBody>
@@ -4387,8 +4387,8 @@
         </p:nvSpPr>
         <p:spPr>
           <a:xfrm>
-            <a:off x="594360" y="4251960"/>
-            <a:ext cx="11002975" cy="384048"/>
+            <a:off x="640080" y="4530852"/>
+            <a:ext cx="10911535" cy="310896"/>
           </a:xfrm>
           <a:prstGeom prst="rect">
             <a:avLst/>
@@ -4403,13 +4403,13 @@
           <a:p>
             <a:pPr algn="ctr"/>
             <a:r>
-              <a:rPr sz="2400" b="0" i="1">
-                <a:solidFill>
-                  <a:srgbClr val="B4B4B4"/>
+              <a:rPr sz="2000" b="0" i="1">
+                <a:solidFill>
+                  <a:srgbClr val="828282"/>
                 </a:solidFill>
                 <a:latin typeface="Arial"/>
               </a:rPr>
-              <a:t>anata ni sasage</a:t>
+              <a:t>De todo o coração</a:t>
             </a:r>
           </a:p>
         </p:txBody>
@@ -4422,8 +4422,8 @@
         </p:nvSpPr>
         <p:spPr>
           <a:xfrm>
-            <a:off x="594360" y="4672584"/>
-            <a:ext cx="11002975" cy="347472"/>
+            <a:off x="640080" y="4896612"/>
+            <a:ext cx="10911535" cy="310896"/>
           </a:xfrm>
           <a:prstGeom prst="rect">
             <a:avLst/>
@@ -4440,11 +4440,11 @@
             <a:r>
               <a:rPr sz="2000" b="0" i="1">
                 <a:solidFill>
-                  <a:srgbClr val="8C8C8C"/>
+                  <a:srgbClr val="828282"/>
                 </a:solidFill>
                 <a:latin typeface="Arial"/>
               </a:rPr>
-              <a:t/>
+              <a:t>Eu adoro a Ti</a:t>
             </a:r>
           </a:p>
         </p:txBody>
@@ -4483,8 +4483,8 @@
         </p:nvSpPr>
         <p:spPr>
           <a:xfrm>
-            <a:off x="594360" y="1837944"/>
-            <a:ext cx="11002975" cy="685800"/>
+            <a:off x="640080" y="1650492"/>
+            <a:ext cx="10911535" cy="731520"/>
           </a:xfrm>
           <a:prstGeom prst="rect">
             <a:avLst/>
@@ -4499,7 +4499,7 @@
           <a:p>
             <a:pPr algn="ctr"/>
             <a:r>
-              <a:rPr sz="4400" b="1" i="0">
+              <a:rPr sz="4800" b="1" i="0">
                 <a:solidFill>
                   <a:srgbClr val="FFFFFF"/>
                 </a:solidFill>
@@ -4518,8 +4518,8 @@
         </p:nvSpPr>
         <p:spPr>
           <a:xfrm>
-            <a:off x="594360" y="2560320"/>
-            <a:ext cx="11002975" cy="384048"/>
+            <a:off x="640080" y="2418588"/>
+            <a:ext cx="10911535" cy="365760"/>
           </a:xfrm>
           <a:prstGeom prst="rect">
             <a:avLst/>
@@ -4536,7 +4536,7 @@
             <a:r>
               <a:rPr sz="2400" b="0" i="1">
                 <a:solidFill>
-                  <a:srgbClr val="B4B4B4"/>
+                  <a:srgbClr val="AAAAAA"/>
                 </a:solidFill>
                 <a:latin typeface="Arial"/>
               </a:rPr>
@@ -4553,8 +4553,8 @@
         </p:nvSpPr>
         <p:spPr>
           <a:xfrm>
-            <a:off x="594360" y="2980944"/>
-            <a:ext cx="11002975" cy="347472"/>
+            <a:off x="640080" y="2985516"/>
+            <a:ext cx="10911535" cy="731520"/>
           </a:xfrm>
           <a:prstGeom prst="rect">
             <a:avLst/>
@@ -4569,13 +4569,13 @@
           <a:p>
             <a:pPr algn="ctr"/>
             <a:r>
-              <a:rPr sz="2000" b="0" i="1">
-                <a:solidFill>
-                  <a:srgbClr val="8C8C8C"/>
+              <a:rPr sz="4800" b="1" i="0">
+                <a:solidFill>
+                  <a:srgbClr val="FFFFFF"/>
                 </a:solidFill>
                 <a:latin typeface="Arial"/>
               </a:rPr>
-              <a:t/>
+              <a:t>あゆませたまえ</a:t>
             </a:r>
           </a:p>
         </p:txBody>
@@ -4588,8 +4588,8 @@
         </p:nvSpPr>
         <p:spPr>
           <a:xfrm>
-            <a:off x="594360" y="3529584"/>
-            <a:ext cx="11002975" cy="685800"/>
+            <a:off x="640080" y="3753612"/>
+            <a:ext cx="10911535" cy="365760"/>
           </a:xfrm>
           <a:prstGeom prst="rect">
             <a:avLst/>
@@ -4604,13 +4604,13 @@
           <a:p>
             <a:pPr algn="ctr"/>
             <a:r>
-              <a:rPr sz="4400" b="1" i="0">
-                <a:solidFill>
-                  <a:srgbClr val="FFFFFF"/>
+              <a:rPr sz="2400" b="0" i="1">
+                <a:solidFill>
+                  <a:srgbClr val="AAAAAA"/>
                 </a:solidFill>
                 <a:latin typeface="Arial"/>
               </a:rPr>
-              <a:t>あゆませたまえ</a:t>
+              <a:t>ayumase Tamae</a:t>
             </a:r>
           </a:p>
         </p:txBody>
@@ -4623,8 +4623,8 @@
         </p:nvSpPr>
         <p:spPr>
           <a:xfrm>
-            <a:off x="594360" y="4251960"/>
-            <a:ext cx="11002975" cy="384048"/>
+            <a:off x="640080" y="4530852"/>
+            <a:ext cx="10911535" cy="310896"/>
           </a:xfrm>
           <a:prstGeom prst="rect">
             <a:avLst/>
@@ -4639,13 +4639,13 @@
           <a:p>
             <a:pPr algn="ctr"/>
             <a:r>
-              <a:rPr sz="2400" b="0" i="1">
-                <a:solidFill>
-                  <a:srgbClr val="B4B4B4"/>
+              <a:rPr sz="2000" b="0" i="1">
+                <a:solidFill>
+                  <a:srgbClr val="828282"/>
                 </a:solidFill>
                 <a:latin typeface="Arial"/>
               </a:rPr>
-              <a:t>ayumase Tamae</a:t>
+              <a:t>Com tudo o que há em mim</a:t>
             </a:r>
           </a:p>
         </p:txBody>
@@ -4658,8 +4658,8 @@
         </p:nvSpPr>
         <p:spPr>
           <a:xfrm>
-            <a:off x="594360" y="4672584"/>
-            <a:ext cx="11002975" cy="347472"/>
+            <a:off x="640080" y="4896612"/>
+            <a:ext cx="10911535" cy="310896"/>
           </a:xfrm>
           <a:prstGeom prst="rect">
             <a:avLst/>
@@ -4676,11 +4676,11 @@
             <a:r>
               <a:rPr sz="2000" b="0" i="1">
                 <a:solidFill>
-                  <a:srgbClr val="8C8C8C"/>
+                  <a:srgbClr val="828282"/>
                 </a:solidFill>
                 <a:latin typeface="Arial"/>
               </a:rPr>
-              <a:t/>
+              <a:t>Te dou meu louvor</a:t>
             </a:r>
           </a:p>
         </p:txBody>
